--- a/content/Lectures/Semester 1/Week 10/1 Lecture/1.10 Reinforcement Learning (Lecture).pptx
+++ b/content/Lectures/Semester 1/Week 10/1 Lecture/1.10 Reinforcement Learning (Lecture).pptx
@@ -561,7 +561,7 @@
                 </a:solidFill>
                 <a:latin typeface="Arial"/>
               </a:rPr>
-              <a:t>. For our purposes though, you’re free to just trust the fact that this is true, and understand the infinite sum of discounted returns is finite if the conditions we outlined are met.</a:t>
+              <a:t>. For our purposes though, you’re free to just trust the fact that this is true, and understand the infinite sum of discounted rewards is finite if the conditions we outlined are met.</a:t>
             </a:r>
             <a:endParaRPr b="0" lang="en-US" sz="1200" spc="-1" strike="noStrike">
               <a:solidFill>
